--- a/part4/FMI3_Outlook.pptx
+++ b/part4/FMI3_Outlook.pptx
@@ -576,7 +576,7 @@
               <a:pPr>
                 <a:defRPr/>
               </a:pPr>
-              <a:t>8/11/2025</a:t>
+              <a:t>9/7/2025</a:t>
             </a:fld>
             <a:endParaRPr lang="en-US"/>
           </a:p>
@@ -8013,7 +8013,7 @@
           <p:nvPr/>
         </p:nvPicPr>
         <p:blipFill>
-          <a:blip r:embed="rId2"/>
+          <a:blip r:embed="rId3"/>
           <a:stretch>
             <a:fillRect/>
           </a:stretch>
@@ -8038,12 +8038,16 @@
             </a:extLst>
           </p:cNvPr>
           <p:cNvSpPr txBox="1"/>
-          <p:nvPr/>
+          <p:nvPr>
+            <p:custDataLst>
+              <p:tags r:id="rId1"/>
+            </p:custDataLst>
+          </p:nvPr>
         </p:nvSpPr>
         <p:spPr>
           <a:xfrm>
-            <a:off x="1677286" y="5396669"/>
-            <a:ext cx="6097772" cy="584775"/>
+            <a:off x="620184" y="5801756"/>
+            <a:ext cx="6097772" cy="338554"/>
           </a:xfrm>
           <a:prstGeom prst="rect">
             <a:avLst/>
@@ -8058,9 +8062,9 @@
           <a:p>
             <a:r>
               <a:rPr lang="en-US" dirty="0">
-                <a:hlinkClick r:id="rId3"/>
-              </a:rPr>
-              <a:t>https://github.com/t-sommer/fmi3-features/blob/main/array_variables.ipynb</a:t>
+                <a:hlinkClick r:id="rId4"/>
+              </a:rPr>
+              <a:t>https://github.com/chrbertsch/fmi3-features/blob/main</a:t>
             </a:r>
             <a:r>
               <a:rPr lang="en-US" dirty="0"/>
@@ -8069,6 +8073,128 @@
           </a:p>
         </p:txBody>
       </p:sp>
+      <p:sp>
+        <p:nvSpPr>
+          <p:cNvPr id="4" name="AutoShape 2" descr="Open In Colab">
+            <a:hlinkClick r:id="rId5"/>
+            <a:extLst>
+              <a:ext uri="{FF2B5EF4-FFF2-40B4-BE49-F238E27FC236}">
+                <a16:creationId xmlns:a16="http://schemas.microsoft.com/office/drawing/2014/main" id="{55EEC886-68CB-34BE-84A6-BA9D935BCC5C}"/>
+              </a:ext>
+            </a:extLst>
+          </p:cNvPr>
+          <p:cNvSpPr>
+            <a:spLocks noChangeAspect="1" noChangeArrowheads="1"/>
+          </p:cNvSpPr>
+          <p:nvPr/>
+        </p:nvSpPr>
+        <p:spPr bwMode="auto">
+          <a:xfrm>
+            <a:off x="5943600" y="3276600"/>
+            <a:ext cx="304800" cy="304800"/>
+          </a:xfrm>
+          <a:prstGeom prst="rect">
+            <a:avLst/>
+          </a:prstGeom>
+          <a:noFill/>
+          <a:extLst>
+            <a:ext uri="{909E8E84-426E-40DD-AFC4-6F175D3DCCD1}">
+              <a14:hiddenFill xmlns:a14="http://schemas.microsoft.com/office/drawing/2010/main">
+                <a:solidFill>
+                  <a:srgbClr val="FFFFFF"/>
+                </a:solidFill>
+              </a14:hiddenFill>
+            </a:ext>
+          </a:extLst>
+        </p:spPr>
+        <p:txBody>
+          <a:bodyPr vert="horz" wrap="square" lIns="91440" tIns="45720" rIns="91440" bIns="45720" numCol="1" anchor="t" anchorCtr="0" compatLnSpc="1">
+            <a:prstTxWarp prst="textNoShape">
+              <a:avLst/>
+            </a:prstTxWarp>
+          </a:bodyPr>
+          <a:lstStyle/>
+          <a:p>
+            <a:endParaRPr lang="en-US"/>
+          </a:p>
+        </p:txBody>
+      </p:sp>
+      <p:sp>
+        <p:nvSpPr>
+          <p:cNvPr id="11" name="AutoShape 8" descr="Open In Colab">
+            <a:extLst>
+              <a:ext uri="{FF2B5EF4-FFF2-40B4-BE49-F238E27FC236}">
+                <a16:creationId xmlns:a16="http://schemas.microsoft.com/office/drawing/2014/main" id="{D29F41E0-787E-2A3D-A7B5-417CC6134188}"/>
+              </a:ext>
+            </a:extLst>
+          </p:cNvPr>
+          <p:cNvSpPr>
+            <a:spLocks noChangeAspect="1" noChangeArrowheads="1"/>
+          </p:cNvSpPr>
+          <p:nvPr/>
+        </p:nvSpPr>
+        <p:spPr bwMode="auto">
+          <a:xfrm>
+            <a:off x="6096000" y="3429000"/>
+            <a:ext cx="304800" cy="304800"/>
+          </a:xfrm>
+          <a:prstGeom prst="rect">
+            <a:avLst/>
+          </a:prstGeom>
+          <a:noFill/>
+          <a:extLst>
+            <a:ext uri="{909E8E84-426E-40DD-AFC4-6F175D3DCCD1}">
+              <a14:hiddenFill xmlns:a14="http://schemas.microsoft.com/office/drawing/2010/main">
+                <a:solidFill>
+                  <a:srgbClr val="FFFFFF"/>
+                </a:solidFill>
+              </a14:hiddenFill>
+            </a:ext>
+          </a:extLst>
+        </p:spPr>
+        <p:txBody>
+          <a:bodyPr vert="horz" wrap="square" lIns="91440" tIns="45720" rIns="91440" bIns="45720" numCol="1" anchor="t" anchorCtr="0" compatLnSpc="1">
+            <a:prstTxWarp prst="textNoShape">
+              <a:avLst/>
+            </a:prstTxWarp>
+          </a:bodyPr>
+          <a:lstStyle/>
+          <a:p>
+            <a:endParaRPr lang="en-US"/>
+          </a:p>
+        </p:txBody>
+      </p:sp>
+      <p:pic>
+        <p:nvPicPr>
+          <p:cNvPr id="13" name="Grafik 12">
+            <a:hlinkClick r:id="rId5"/>
+            <a:extLst>
+              <a:ext uri="{FF2B5EF4-FFF2-40B4-BE49-F238E27FC236}">
+                <a16:creationId xmlns:a16="http://schemas.microsoft.com/office/drawing/2014/main" id="{14BBB87F-F830-7E93-659B-B3DF23A31712}"/>
+              </a:ext>
+            </a:extLst>
+          </p:cNvPr>
+          <p:cNvPicPr>
+            <a:picLocks noChangeAspect="1"/>
+          </p:cNvPicPr>
+          <p:nvPr/>
+        </p:nvPicPr>
+        <p:blipFill>
+          <a:blip r:embed="rId6"/>
+          <a:stretch>
+            <a:fillRect/>
+          </a:stretch>
+        </p:blipFill>
+        <p:spPr>
+          <a:xfrm>
+            <a:off x="6096000" y="5921985"/>
+            <a:ext cx="1151207" cy="221093"/>
+          </a:xfrm>
+          <a:prstGeom prst="rect">
+            <a:avLst/>
+          </a:prstGeom>
+        </p:spPr>
+      </p:pic>
     </p:spTree>
     <p:extLst>
       <p:ext uri="{BB962C8B-B14F-4D97-AF65-F5344CB8AC3E}">
@@ -8183,7 +8309,7 @@
           <p:nvPr/>
         </p:nvPicPr>
         <p:blipFill>
-          <a:blip r:embed="rId3"/>
+          <a:blip r:embed="rId4"/>
           <a:stretch>
             <a:fillRect/>
           </a:stretch>
@@ -8213,7 +8339,7 @@
           <p:nvPr/>
         </p:nvPicPr>
         <p:blipFill>
-          <a:blip r:embed="rId4"/>
+          <a:blip r:embed="rId5"/>
           <a:stretch>
             <a:fillRect/>
           </a:stretch>
@@ -8243,10 +8369,10 @@
           <p:nvPr/>
         </p:nvPicPr>
         <p:blipFill>
-          <a:blip r:embed="rId5">
+          <a:blip r:embed="rId6">
             <a:extLst>
               <a:ext uri="{96DAC541-7B7A-43D3-8B79-37D633B846F1}">
-                <asvg:svgBlip xmlns:asvg="http://schemas.microsoft.com/office/drawing/2016/SVG/main" r:embed="rId6"/>
+                <asvg:svgBlip xmlns:asvg="http://schemas.microsoft.com/office/drawing/2016/SVG/main" r:embed="rId7"/>
               </a:ext>
             </a:extLst>
           </a:blip>
@@ -8279,7 +8405,7 @@
           <p:nvPr/>
         </p:nvPicPr>
         <p:blipFill>
-          <a:blip r:embed="rId7">
+          <a:blip r:embed="rId8">
             <a:extLst>
               <a:ext uri="{28A0092B-C50C-407E-A947-70E740481C1C}">
                 <a14:useLocalDpi xmlns:a14="http://schemas.microsoft.com/office/drawing/2010/main" val="0"/>
@@ -8353,6 +8479,82 @@
           </a:p>
         </p:txBody>
       </p:sp>
+      <p:sp>
+        <p:nvSpPr>
+          <p:cNvPr id="4" name="Textfeld 3">
+            <a:extLst>
+              <a:ext uri="{FF2B5EF4-FFF2-40B4-BE49-F238E27FC236}">
+                <a16:creationId xmlns:a16="http://schemas.microsoft.com/office/drawing/2014/main" id="{77331729-79A5-8F6B-C354-4F29977977C2}"/>
+              </a:ext>
+            </a:extLst>
+          </p:cNvPr>
+          <p:cNvSpPr txBox="1"/>
+          <p:nvPr>
+            <p:custDataLst>
+              <p:tags r:id="rId1"/>
+            </p:custDataLst>
+          </p:nvPr>
+        </p:nvSpPr>
+        <p:spPr>
+          <a:xfrm>
+            <a:off x="4876610" y="6454815"/>
+            <a:ext cx="6097772" cy="338554"/>
+          </a:xfrm>
+          <a:prstGeom prst="rect">
+            <a:avLst/>
+          </a:prstGeom>
+          <a:noFill/>
+        </p:spPr>
+        <p:txBody>
+          <a:bodyPr wrap="square">
+            <a:spAutoFit/>
+          </a:bodyPr>
+          <a:lstStyle/>
+          <a:p>
+            <a:r>
+              <a:rPr lang="en-US" dirty="0">
+                <a:hlinkClick r:id="rId9"/>
+              </a:rPr>
+              <a:t>https://github.com/chrbertsch/fmi3-features/blob/main</a:t>
+            </a:r>
+            <a:r>
+              <a:rPr lang="en-US" dirty="0"/>
+              <a:t> </a:t>
+            </a:r>
+          </a:p>
+        </p:txBody>
+      </p:sp>
+      <p:pic>
+        <p:nvPicPr>
+          <p:cNvPr id="8" name="Grafik 7">
+            <a:hlinkClick r:id="rId10"/>
+            <a:extLst>
+              <a:ext uri="{FF2B5EF4-FFF2-40B4-BE49-F238E27FC236}">
+                <a16:creationId xmlns:a16="http://schemas.microsoft.com/office/drawing/2014/main" id="{6EFD1252-153A-E29C-481F-C27095427736}"/>
+              </a:ext>
+            </a:extLst>
+          </p:cNvPr>
+          <p:cNvPicPr>
+            <a:picLocks noChangeAspect="1"/>
+          </p:cNvPicPr>
+          <p:nvPr/>
+        </p:nvPicPr>
+        <p:blipFill>
+          <a:blip r:embed="rId11"/>
+          <a:stretch>
+            <a:fillRect/>
+          </a:stretch>
+        </p:blipFill>
+        <p:spPr>
+          <a:xfrm>
+            <a:off x="10352426" y="6575044"/>
+            <a:ext cx="1151207" cy="221093"/>
+          </a:xfrm>
+          <a:prstGeom prst="rect">
+            <a:avLst/>
+          </a:prstGeom>
+        </p:spPr>
+      </p:pic>
     </p:spTree>
     <p:extLst>
       <p:ext uri="{BB962C8B-B14F-4D97-AF65-F5344CB8AC3E}">
@@ -8401,7 +8603,7 @@
           </p:nvPr>
         </p:nvPicPr>
         <p:blipFill>
-          <a:blip r:embed="rId2"/>
+          <a:blip r:embed="rId3"/>
           <a:stretch>
             <a:fillRect/>
           </a:stretch>
@@ -8443,20 +8645,24 @@
       </p:sp>
       <p:sp>
         <p:nvSpPr>
-          <p:cNvPr id="9" name="Textfeld 8">
+          <p:cNvPr id="2" name="Textfeld 1">
             <a:extLst>
               <a:ext uri="{FF2B5EF4-FFF2-40B4-BE49-F238E27FC236}">
-                <a16:creationId xmlns:a16="http://schemas.microsoft.com/office/drawing/2014/main" id="{BAFE7CE8-B64F-479A-AEC0-5579BE32BDAC}"/>
+                <a16:creationId xmlns:a16="http://schemas.microsoft.com/office/drawing/2014/main" id="{225D2B0B-F60D-3982-A987-A1CFA568C38F}"/>
               </a:ext>
             </a:extLst>
           </p:cNvPr>
           <p:cNvSpPr txBox="1"/>
-          <p:nvPr/>
+          <p:nvPr>
+            <p:custDataLst>
+              <p:tags r:id="rId1"/>
+            </p:custDataLst>
+          </p:nvPr>
         </p:nvSpPr>
         <p:spPr>
           <a:xfrm>
-            <a:off x="5845249" y="5569962"/>
-            <a:ext cx="6097772" cy="584775"/>
+            <a:off x="620184" y="5801756"/>
+            <a:ext cx="6097772" cy="338554"/>
           </a:xfrm>
           <a:prstGeom prst="rect">
             <a:avLst/>
@@ -8471,9 +8677,9 @@
           <a:p>
             <a:r>
               <a:rPr lang="en-US" dirty="0">
-                <a:hlinkClick r:id="rId3"/>
-              </a:rPr>
-              <a:t>https://github.com/t-sommer/fmi3-features/blob/main/intermediate_update.ipynb</a:t>
+                <a:hlinkClick r:id="rId4"/>
+              </a:rPr>
+              <a:t>https://github.com/chrbertsch/fmi3-features/blob/main</a:t>
             </a:r>
             <a:r>
               <a:rPr lang="en-US" dirty="0"/>
@@ -8482,6 +8688,37 @@
           </a:p>
         </p:txBody>
       </p:sp>
+      <p:pic>
+        <p:nvPicPr>
+          <p:cNvPr id="4" name="Grafik 3">
+            <a:hlinkClick r:id="rId5"/>
+            <a:extLst>
+              <a:ext uri="{FF2B5EF4-FFF2-40B4-BE49-F238E27FC236}">
+                <a16:creationId xmlns:a16="http://schemas.microsoft.com/office/drawing/2014/main" id="{E382A519-B893-636A-16AC-D7F9FC88F775}"/>
+              </a:ext>
+            </a:extLst>
+          </p:cNvPr>
+          <p:cNvPicPr>
+            <a:picLocks noChangeAspect="1"/>
+          </p:cNvPicPr>
+          <p:nvPr/>
+        </p:nvPicPr>
+        <p:blipFill>
+          <a:blip r:embed="rId6"/>
+          <a:stretch>
+            <a:fillRect/>
+          </a:stretch>
+        </p:blipFill>
+        <p:spPr>
+          <a:xfrm>
+            <a:off x="6096000" y="5921985"/>
+            <a:ext cx="1151207" cy="221093"/>
+          </a:xfrm>
+          <a:prstGeom prst="rect">
+            <a:avLst/>
+          </a:prstGeom>
+        </p:spPr>
+      </p:pic>
     </p:spTree>
     <p:extLst>
       <p:ext uri="{BB962C8B-B14F-4D97-AF65-F5344CB8AC3E}">
@@ -8752,6 +8989,33 @@
   <p:tag name="EMPOWERCHARTSPROPERTIES_A_LENGTH" val="24576"/>
   <p:tag name="COAUTHORING_SESSION_ID" val="e58276d2-87ab-4348-a9b1-d35fa503961a"/>
   <p:tag name="UNDO_REDO_REVISION" val="3"/>
+</p:tagLst>
+</file>
+
+<file path=ppt/tags/tag2.xml><?xml version="1.0" encoding="utf-8"?>
+<p:tagLst xmlns:a="http://schemas.openxmlformats.org/drawingml/2006/main" xmlns:r="http://schemas.openxmlformats.org/officeDocument/2006/relationships" xmlns:p="http://schemas.openxmlformats.org/presentationml/2006/main">
+  <p:tag name="RUNTIME_ID" val="1420cf2c-1ab6-4c6e-849b-ab382f70ce37"/>
+  <p:tag name="F021C77BD77B4420AF9C257AA0279F60-0" val="&lt;Properties&gt;&#10;  &lt;Property Name=&quot;LinkDataList&quot; Version=&quot;1&quot;&gt;&#10;    &lt;data&gt;kA==&lt;/data&gt;&#10;    &lt;timestamp&gt;638928597026038215&lt;/timestamp&gt;&#10;  &lt;/Property&gt;&#10;  &lt;Property Name=&quot;PersonalId&quot; Version=&quot;0&quot;&gt;&#10;    &lt;data&gt;kaA=&lt;/data&gt;&#10;    &lt;timestamp&gt;638928597026114351&lt;/timestamp&gt;&#10;  &lt;/Property&gt;&#10;&lt;/Properties&gt;"/>
+  <p:tag name="EMPOWER_CHARTS_DATA_ID" val="F021C77BD77B4420AF9C257AA0279F60"/>
+  <p:tag name="EMPOWER_DATA_LAST_WRITE" val="638928597036287782"/>
+</p:tagLst>
+</file>
+
+<file path=ppt/tags/tag3.xml><?xml version="1.0" encoding="utf-8"?>
+<p:tagLst xmlns:a="http://schemas.openxmlformats.org/drawingml/2006/main" xmlns:r="http://schemas.openxmlformats.org/officeDocument/2006/relationships" xmlns:p="http://schemas.openxmlformats.org/presentationml/2006/main">
+  <p:tag name="RUNTIME_ID" val="7885bea7-d909-41b9-a979-23a46bc25c61"/>
+  <p:tag name="08E9B16B68204DE2BE578E8E0AB13AEB-0" val="&lt;Properties&gt;&#10;  &lt;Property Name=&quot;LinkDataList&quot; Version=&quot;1&quot;&gt;&#10;    &lt;data&gt;kA==&lt;/data&gt;&#10;    &lt;timestamp&gt;638928597075072265&lt;/timestamp&gt;&#10;  &lt;/Property&gt;&#10;  &lt;Property Name=&quot;PersonalId&quot; Version=&quot;0&quot;&gt;&#10;    &lt;data&gt;kaA=&lt;/data&gt;&#10;    &lt;timestamp&gt;638928597075100707&lt;/timestamp&gt;&#10;  &lt;/Property&gt;&#10;&lt;/Properties&gt;"/>
+  <p:tag name="EMPOWER_CHARTS_DATA_ID" val="08E9B16B68204DE2BE578E8E0AB13AEB"/>
+  <p:tag name="EMPOWER_DATA_LAST_WRITE" val="638928597085154246"/>
+</p:tagLst>
+</file>
+
+<file path=ppt/tags/tag4.xml><?xml version="1.0" encoding="utf-8"?>
+<p:tagLst xmlns:a="http://schemas.openxmlformats.org/drawingml/2006/main" xmlns:r="http://schemas.openxmlformats.org/officeDocument/2006/relationships" xmlns:p="http://schemas.openxmlformats.org/presentationml/2006/main">
+  <p:tag name="RUNTIME_ID" val="5264ae01-37b2-4e91-910c-93cb4a4c4b37"/>
+  <p:tag name="7812D6EA2A5C4DEE826CBDD3BBB2F8B2-0" val="&lt;Properties&gt;&#10;  &lt;Property Name=&quot;LinkDataList&quot; Version=&quot;1&quot;&gt;&#10;    &lt;data&gt;kA==&lt;/data&gt;&#10;    &lt;timestamp&gt;638928597207568789&lt;/timestamp&gt;&#10;  &lt;/Property&gt;&#10;  &lt;Property Name=&quot;PersonalId&quot; Version=&quot;0&quot;&gt;&#10;    &lt;data&gt;kaA=&lt;/data&gt;&#10;    &lt;timestamp&gt;638928597207572391&lt;/timestamp&gt;&#10;  &lt;/Property&gt;&#10;&lt;/Properties&gt;"/>
+  <p:tag name="EMPOWER_CHARTS_DATA_ID" val="7812D6EA2A5C4DEE826CBDD3BBB2F8B2"/>
+  <p:tag name="EMPOWER_DATA_LAST_WRITE" val="638928597217747218"/>
 </p:tagLst>
 </file>
 
